--- a/decks/geog-living-world/geog-living-world_ch2_change-and-biomes.pptx
+++ b/decks/geog-living-world/geog-living-world_ch2_change-and-biomes.pptx
@@ -127,30 +127,30 @@
   <p:extLst>
     <p:ext uri="{521415D9-36F7-43E2-AB2F-B90AF26B5E84}">
       <p14:sectionLst xmlns:p14="http://schemas.microsoft.com/office/powerpoint/2010/main">
-        <p14:section name="Opening" id="{5b187277-2eab-5d67-279c-d2a9213ac1b3}">
+        <p14:section name="Opening" id="{aaa5b9d6-52a7-b5d7-5a93-54f8e4fb3976}">
           <p14:sldIdLst>
             <p14:sldId id="256"/>
           </p14:sldIdLst>
         </p14:section>
-        <p14:section name="Gate" id="{442644c4-f683-74a1-2de6-8527e371219a}">
+        <p14:section name="Gate" id="{3b74af51-1182-861f-76f8-5f26abfa9cd7}">
           <p14:sldIdLst>
             <p14:sldId id="257"/>
             <p14:sldId id="258"/>
           </p14:sldIdLst>
         </p14:section>
-        <p14:section name="Pre-teach" id="{43ed2bd6-b22e-1096-ea08-e40a6a210351}">
+        <p14:section name="Pre-teach" id="{892c39ea-6a8d-4176-67f3-55a262db82ee}">
           <p14:sldIdLst>
             <p14:sldId id="259"/>
             <p14:sldId id="260"/>
           </p14:sldIdLst>
         </p14:section>
-        <p14:section name="Read-along" id="{b4a4aa3b-6119-23fb-e450-d96f6f4aea49}">
+        <p14:section name="Read-along" id="{4509cd12-e66b-c6a3-0eb6-baf53e1229aa}">
           <p14:sldIdLst>
             <p14:sldId id="261"/>
             <p14:sldId id="262"/>
           </p14:sldIdLst>
         </p14:section>
-        <p14:section name="Teach" id="{07acfc67-ff3e-26bf-5e73-42d24eb3c132}">
+        <p14:section name="Teach" id="{6ef333e2-4651-5e62-a3a1-ec15ae2c66d3}">
           <p14:sldIdLst>
             <p14:sldId id="263"/>
             <p14:sldId id="264"/>
@@ -160,7 +160,7 @@
             <p14:sldId id="268"/>
           </p14:sldIdLst>
         </p14:section>
-        <p14:section name="Routes" id="{bb25eb07-7a57-1629-c9df-643522d96d30}">
+        <p14:section name="Routes" id="{7d89088d-687f-c319-34fe-9c7e159e4055}">
           <p14:sldIdLst>
             <p14:sldId id="269"/>
             <p14:sldId id="270"/>
@@ -168,12 +168,12 @@
             <p14:sldId id="272"/>
           </p14:sldIdLst>
         </p14:section>
-        <p14:section name="Close" id="{ff11b6e8-0c2d-d8af-c57c-098d0e900c24}">
+        <p14:section name="Close" id="{015c44c6-23c9-da20-b2e0-edacc9c6a267}">
           <p14:sldIdLst>
             <p14:sldId id="273"/>
           </p14:sldIdLst>
         </p14:section>
-        <p14:section name="Answers" id="{004c49a8-911d-81a5-7499-bcb9e13d76cc}">
+        <p14:section name="Answers" id="{738fa4db-de36-2adf-8398-9ee26c9d11c8}">
           <p14:sldIdLst>
             <p14:sldId id="274"/>
             <p14:sldId id="275"/>
@@ -676,7 +676,7 @@
             <a:r>
               <a:rPr lang="en-US" dirty="0"/>
               <a:t>Teach — Human change and knock-on effects. Say it in your own words, then check understanding with a quick question: ask a pupil from the pre-teach group first, since they met these words and ideas before the lesson. Pupils try to recall before you re-explain.
-Ecosystems are sometimes damaged in permanent ways, especially when human forces such as deforestation are involved. Removing the forest exposes the soil beneath to rainfall, so it can be washed away, making it impossible for the ecosystem to recover. In the long term, climate change could have an impact too: changing temperature and precipitation patterns in southern England might make it harder for ecosystems like Epping Forest to survive in their current form.
+Ecosystems are sometimes damaged in permanent ways, especially when human forces such as deforestation are involved. Removing the forest leaves the soil bare under the rain, and once that soil has washed off the slope the ecosystem has nothing left to rebuild itself from. Climate change works more slowly but pushes the same way: if southern England grows warmer and its rainfall less dependable, a woodland such as Epping Forest may not be able to hold the mixture of species it holds today.
 Because everything in a food web is linked, a change to one species has knock-on effects on others. Your lesson used an oak woodland web in which beetles are eaten by woodpeckers, and woodpeckers by owls and hawks. Suppose disease reduces the beetle population. The direct effect: woodpeckers have fewer meals, so their numbers may decline, while the oak trees may grow better because fewer beetles are feeding on them. The indirect effects: owl and hawk numbers may fall because they feed on woodpeckers; or the woodpeckers, which have several food sources, may simply eat more caterpillars, which would then cause problems for the blue tits that also depend on caterpillars.
 Ecosystems can also be restored deliberately. In Epping Forest, cattle grazing has been reintroduced to encourage the growth of vegetation, including veteran trees such as oak, whose numbers fell between 1976 and 1988 because of drought and storm damage. Grazing animals keep the grass short and their hooves open up bare ground, which lets low-growing flowers such as bird's-foot trefoil thrive in a way that mowing would not. More oak means more food for the animals that depend on it, so the number of species is kept up or increased.
 Worked example — model it step by step, thinking aloud: In an oak woodland, beetles are eaten by woodpeckers, and woodpeckers are eaten by owls. Explain one direct and one indirect effect of a disease that kills most of the beetles. (4 marks) (1) Find the species that eats the beetles directly: the woodpecker. Fewer beetles means fewer meals, so woodpecker numbers may fall. That is the direct effect. (2) Follow the chain one link further: owls eat woodpeckers. Fewer woodpeckers means less food for owls, so owl numbers may fall. That is the indirect effect. (3) Use the word because to link each effect to its cause, and the word may, since the web could adjust (woodpeckers might switch to other food). (4) Two effects, each explained with a reason, earns the four marks. Answer: Direct effect: woodpecker numbers may fall because they have fewer beetles to eat. Indirect effect: owl numbers may then fall because there are fewer woodpeckers for them to eat..
@@ -769,7 +769,7 @@
             <a:r>
               <a:rPr lang="en-US" dirty="0"/>
               <a:t>Teach — Human change and knock-on effects. Say it in your own words, then check understanding with a quick question: ask a pupil from the pre-teach group first, since they met these words and ideas before the lesson. Pupils try to recall before you re-explain.
-Ecosystems are sometimes damaged in permanent ways, especially when human forces such as deforestation are involved. Removing the forest exposes the soil beneath to rainfall, so it can be washed away, making it impossible for the ecosystem to recover. In the long term, climate change could have an impact too: changing temperature and precipitation patterns in southern England might make it harder for ecosystems like Epping Forest to survive in their current form.
+Ecosystems are sometimes damaged in permanent ways, especially when human forces such as deforestation are involved. Removing the forest leaves the soil bare under the rain, and once that soil has washed off the slope the ecosystem has nothing left to rebuild itself from. Climate change works more slowly but pushes the same way: if southern England grows warmer and its rainfall less dependable, a woodland such as Epping Forest may not be able to hold the mixture of species it holds today.
 Because everything in a food web is linked, a change to one species has knock-on effects on others. Your lesson used an oak woodland web in which beetles are eaten by woodpeckers, and woodpeckers by owls and hawks. Suppose disease reduces the beetle population. The direct effect: woodpeckers have fewer meals, so their numbers may decline, while the oak trees may grow better because fewer beetles are feeding on them. The indirect effects: owl and hawk numbers may fall because they feed on woodpeckers; or the woodpeckers, which have several food sources, may simply eat more caterpillars, which would then cause problems for the blue tits that also depend on caterpillars.
 Ecosystems can also be restored deliberately. In Epping Forest, cattle grazing has been reintroduced to encourage the growth of vegetation, including veteran trees such as oak, whose numbers fell between 1976 and 1988 because of drought and storm damage. Grazing animals keep the grass short and their hooves open up bare ground, which lets low-growing flowers such as bird's-foot trefoil thrive in a way that mowing would not. More oak means more food for the animals that depend on it, so the number of species is kept up or increased.
 Worked example — model it step by step, thinking aloud: In an oak woodland, beetles are eaten by woodpeckers, and woodpeckers are eaten by owls. Explain one direct and one indirect effect of a disease that kills most of the beetles. (4 marks) (1) Find the species that eats the beetles directly: the woodpecker. Fewer beetles means fewer meals, so woodpecker numbers may fall. That is the direct effect. (2) Follow the chain one link further: owls eat woodpeckers. Fewer woodpeckers means less food for owls, so owl numbers may fall. That is the indirect effect. (3) Use the word because to link each effect to its cause, and the word may, since the web could adjust (woodpeckers might switch to other food). (4) Two effects, each explained with a reason, earns the four marks. Answer: Direct effect: woodpecker numbers may fall because they have fewer beetles to eat. Indirect effect: owl numbers may then fall because there are fewer woodpeckers for them to eat..
@@ -2445,7 +2445,7 @@
             <a:r>
               <a:rPr lang="en-US" dirty="0"/>
               <a:t>Teach — Human change and knock-on effects. Say it in your own words, then check understanding with a quick question: ask a pupil from the pre-teach group first, since they met these words and ideas before the lesson. Pupils try to recall before you re-explain.
-Ecosystems are sometimes damaged in permanent ways, especially when human forces such as deforestation are involved. Removing the forest exposes the soil beneath to rainfall, so it can be washed away, making it impossible for the ecosystem to recover. In the long term, climate change could have an impact too: changing temperature and precipitation patterns in southern England might make it harder for ecosystems like Epping Forest to survive in their current form.
+Ecosystems are sometimes damaged in permanent ways, especially when human forces such as deforestation are involved. Removing the forest leaves the soil bare under the rain, and once that soil has washed off the slope the ecosystem has nothing left to rebuild itself from. Climate change works more slowly but pushes the same way: if southern England grows warmer and its rainfall less dependable, a woodland such as Epping Forest may not be able to hold the mixture of species it holds today.
 Because everything in a food web is linked, a change to one species has knock-on effects on others. Your lesson used an oak woodland web in which beetles are eaten by woodpeckers, and woodpeckers by owls and hawks. Suppose disease reduces the beetle population. The direct effect: woodpeckers have fewer meals, so their numbers may decline, while the oak trees may grow better because fewer beetles are feeding on them. The indirect effects: owl and hawk numbers may fall because they feed on woodpeckers; or the woodpeckers, which have several food sources, may simply eat more caterpillars, which would then cause problems for the blue tits that also depend on caterpillars.
 Ecosystems can also be restored deliberately. In Epping Forest, cattle grazing has been reintroduced to encourage the growth of vegetation, including veteran trees such as oak, whose numbers fell between 1976 and 1988 because of drought and storm damage. Grazing animals keep the grass short and their hooves open up bare ground, which lets low-growing flowers such as bird's-foot trefoil thrive in a way that mowing would not. More oak means more food for the animals that depend on it, so the number of species is kept up or increased.
 Worked example — model it step by step, thinking aloud: In an oak woodland, beetles are eaten by woodpeckers, and woodpeckers are eaten by owls. Explain one direct and one indirect effect of a disease that kills most of the beetles. (4 marks) (1) Find the species that eats the beetles directly: the woodpecker. Fewer beetles means fewer meals, so woodpecker numbers may fall. That is the direct effect. (2) Follow the chain one link further: owls eat woodpeckers. Fewer woodpeckers means less food for owls, so owl numbers may fall. That is the indirect effect. (3) Use the word because to link each effect to its cause, and the word may, since the web could adjust (woodpeckers might switch to other food). (4) Two effects, each explained with a reason, earns the four marks. Answer: Direct effect: woodpecker numbers may fall because they have fewer beetles to eat. Indirect effect: owl numbers may then fall because there are fewer woodpeckers for them to eat..
